--- a/m1/diapositivos/sessao-03-m1-f05.pptx
+++ b/m1/diapositivos/sessao-03-m1-f05.pptx
@@ -1200,7 +1200,75 @@
                 <a:ea typeface="Georgia" pitchFamily="34" charset="-122"/>
                 <a:cs typeface="Georgia" pitchFamily="34" charset="-120"/>
               </a:rPr>
-              <a:t>Entre luna e lua caiu uma letra. Entre o latim e o português caíram séculos, e as mudanças seguem regras.</a:t>
+              <a:t>Entre </a:t>
+            </a:r>
+            <a:pPr indent="0" marL="0">
+              <a:lnSpc>
+                <a:spcPct val="115000"/>
+              </a:lnSpc>
+              <a:buNone/>
+            </a:pPr>
+            <a:r>
+              <a:rPr lang="en-US" sz="2000" i="1" dirty="0">
+                <a:solidFill>
+                  <a:srgbClr val="F2F0EA"/>
+                </a:solidFill>
+                <a:latin typeface="Georgia" pitchFamily="34" charset="0"/>
+                <a:ea typeface="Georgia" pitchFamily="34" charset="-122"/>
+                <a:cs typeface="Georgia" pitchFamily="34" charset="-120"/>
+              </a:rPr>
+              <a:t>luna</a:t>
+            </a:r>
+            <a:pPr indent="0" marL="0">
+              <a:lnSpc>
+                <a:spcPct val="115000"/>
+              </a:lnSpc>
+              <a:buNone/>
+            </a:pPr>
+            <a:r>
+              <a:rPr lang="en-US" sz="2000" i="1" dirty="0">
+                <a:solidFill>
+                  <a:srgbClr val="F2F0EA"/>
+                </a:solidFill>
+                <a:latin typeface="Georgia" pitchFamily="34" charset="0"/>
+                <a:ea typeface="Georgia" pitchFamily="34" charset="-122"/>
+                <a:cs typeface="Georgia" pitchFamily="34" charset="-120"/>
+              </a:rPr>
+              <a:t> e </a:t>
+            </a:r>
+            <a:pPr indent="0" marL="0">
+              <a:lnSpc>
+                <a:spcPct val="115000"/>
+              </a:lnSpc>
+              <a:buNone/>
+            </a:pPr>
+            <a:r>
+              <a:rPr lang="en-US" sz="2000" i="1" dirty="0">
+                <a:solidFill>
+                  <a:srgbClr val="F2F0EA"/>
+                </a:solidFill>
+                <a:latin typeface="Georgia" pitchFamily="34" charset="0"/>
+                <a:ea typeface="Georgia" pitchFamily="34" charset="-122"/>
+                <a:cs typeface="Georgia" pitchFamily="34" charset="-120"/>
+              </a:rPr>
+              <a:t>lua</a:t>
+            </a:r>
+            <a:pPr indent="0" marL="0">
+              <a:lnSpc>
+                <a:spcPct val="115000"/>
+              </a:lnSpc>
+              <a:buNone/>
+            </a:pPr>
+            <a:r>
+              <a:rPr lang="en-US" sz="2000" i="1" dirty="0">
+                <a:solidFill>
+                  <a:srgbClr val="F2F0EA"/>
+                </a:solidFill>
+                <a:latin typeface="Georgia" pitchFamily="34" charset="0"/>
+                <a:ea typeface="Georgia" pitchFamily="34" charset="-122"/>
+                <a:cs typeface="Georgia" pitchFamily="34" charset="-120"/>
+              </a:rPr>
+              <a:t> caiu uma letra. Entre o latim e o português caíram séculos, e as mudanças seguem regras.</a:t>
             </a:r>
             <a:endParaRPr lang="en-US" sz="2000" dirty="0"/>
           </a:p>
@@ -2587,9 +2655,6 @@
               <a:lnSpc>
                 <a:spcPct val="120000"/>
               </a:lnSpc>
-              <a:spcAft>
-                <a:spcPts val="1000"/>
-              </a:spcAft>
               <a:buNone/>
             </a:pPr>
             <a:r>
@@ -2601,22 +2666,16 @@
                 <a:ea typeface="Georgia" pitchFamily="34" charset="-122"/>
                 <a:cs typeface="Georgia" pitchFamily="34" charset="-120"/>
               </a:rPr>
-              <a:t>Estes processos mudam sons. Escrevem-se com letras porque é assim que vemos as palavras, mas o que muda é o som que cada letra representa.</a:t>
-            </a:r>
-            <a:endParaRPr lang="en-US" sz="2000" dirty="0"/>
-          </a:p>
-          <a:p>
+              <a:t>Estes processos mudam </a:t>
+            </a:r>
             <a:pPr indent="0" marL="0">
               <a:lnSpc>
                 <a:spcPct val="120000"/>
               </a:lnSpc>
-              <a:spcAft>
-                <a:spcPts val="1000"/>
-              </a:spcAft>
-              <a:buNone/>
-            </a:pPr>
-            <a:r>
-              <a:rPr lang="en-US" sz="2000" dirty="0">
+              <a:buNone/>
+            </a:pPr>
+            <a:r>
+              <a:rPr lang="en-US" sz="2000" b="1" dirty="0">
                 <a:solidFill>
                   <a:srgbClr val="F2F0EA"/>
                 </a:solidFill>
@@ -2624,18 +2683,12 @@
                 <a:ea typeface="Georgia" pitchFamily="34" charset="-122"/>
                 <a:cs typeface="Georgia" pitchFamily="34" charset="-120"/>
               </a:rPr>
-              <a:t>No início: prótese (acrescenta-se um som) e aférese (cai um som).</a:t>
-            </a:r>
-            <a:endParaRPr lang="en-US" sz="2000" dirty="0"/>
-          </a:p>
-          <a:p>
+              <a:t>sons</a:t>
+            </a:r>
             <a:pPr indent="0" marL="0">
               <a:lnSpc>
                 <a:spcPct val="120000"/>
               </a:lnSpc>
-              <a:spcAft>
-                <a:spcPts val="1000"/>
-              </a:spcAft>
               <a:buNone/>
             </a:pPr>
             <a:r>
@@ -2647,22 +2700,16 @@
                 <a:ea typeface="Georgia" pitchFamily="34" charset="-122"/>
                 <a:cs typeface="Georgia" pitchFamily="34" charset="-120"/>
               </a:rPr>
-              <a:t>No meio: epêntese (acrescenta-se um som) e síncope (cai um som).</a:t>
-            </a:r>
-            <a:endParaRPr lang="en-US" sz="2000" dirty="0"/>
-          </a:p>
-          <a:p>
+              <a:t>. Escrevem-se com letras porque é assim que vemos as palavras, mas o que muda é o som que cada letra representa. </a:t>
+            </a:r>
             <a:pPr indent="0" marL="0">
               <a:lnSpc>
                 <a:spcPct val="120000"/>
               </a:lnSpc>
-              <a:spcAft>
-                <a:spcPts val="1000"/>
-              </a:spcAft>
-              <a:buNone/>
-            </a:pPr>
-            <a:r>
-              <a:rPr lang="en-US" sz="2000" dirty="0">
+              <a:buNone/>
+            </a:pPr>
+            <a:r>
+              <a:rPr lang="en-US" sz="2000" b="1" dirty="0">
                 <a:solidFill>
                   <a:srgbClr val="F2F0EA"/>
                 </a:solidFill>
@@ -2670,18 +2717,12 @@
                 <a:ea typeface="Georgia" pitchFamily="34" charset="-122"/>
                 <a:cs typeface="Georgia" pitchFamily="34" charset="-120"/>
               </a:rPr>
-              <a:t>No fim: paragoge (acrescenta-se um som) e apócope (cai um som).</a:t>
-            </a:r>
-            <a:endParaRPr lang="en-US" sz="2000" dirty="0"/>
-          </a:p>
-          <a:p>
+              <a:t>No início</a:t>
+            </a:r>
             <a:pPr indent="0" marL="0">
               <a:lnSpc>
                 <a:spcPct val="120000"/>
               </a:lnSpc>
-              <a:spcAft>
-                <a:spcPts val="1000"/>
-              </a:spcAft>
               <a:buNone/>
             </a:pPr>
             <a:r>
@@ -2693,7 +2734,109 @@
                 <a:ea typeface="Georgia" pitchFamily="34" charset="-122"/>
                 <a:cs typeface="Georgia" pitchFamily="34" charset="-120"/>
               </a:rPr>
-              <a:t>Outras mudanças: metátese (sons trocam de lugar), sonorização (um som consonântico surdo passa a sonoro: p&gt;b, t&gt;d, c&gt;g), palatalização (um som passa a palatal, por exemplo ch, lh, nh) e assimilação (um som fica igual ou parecido com o vizinho).</a:t>
+              <a:t>: prótese (acrescenta-se um som) e aférese (cai um som). </a:t>
+            </a:r>
+            <a:pPr indent="0" marL="0">
+              <a:lnSpc>
+                <a:spcPct val="120000"/>
+              </a:lnSpc>
+              <a:buNone/>
+            </a:pPr>
+            <a:r>
+              <a:rPr lang="en-US" sz="2000" b="1" dirty="0">
+                <a:solidFill>
+                  <a:srgbClr val="F2F0EA"/>
+                </a:solidFill>
+                <a:latin typeface="Georgia" pitchFamily="34" charset="0"/>
+                <a:ea typeface="Georgia" pitchFamily="34" charset="-122"/>
+                <a:cs typeface="Georgia" pitchFamily="34" charset="-120"/>
+              </a:rPr>
+              <a:t>No meio</a:t>
+            </a:r>
+            <a:pPr indent="0" marL="0">
+              <a:lnSpc>
+                <a:spcPct val="120000"/>
+              </a:lnSpc>
+              <a:buNone/>
+            </a:pPr>
+            <a:r>
+              <a:rPr lang="en-US" sz="2000" dirty="0">
+                <a:solidFill>
+                  <a:srgbClr val="F2F0EA"/>
+                </a:solidFill>
+                <a:latin typeface="Georgia" pitchFamily="34" charset="0"/>
+                <a:ea typeface="Georgia" pitchFamily="34" charset="-122"/>
+                <a:cs typeface="Georgia" pitchFamily="34" charset="-120"/>
+              </a:rPr>
+              <a:t>: epêntese (acrescenta-se um som) e síncope (cai um som). </a:t>
+            </a:r>
+            <a:pPr indent="0" marL="0">
+              <a:lnSpc>
+                <a:spcPct val="120000"/>
+              </a:lnSpc>
+              <a:buNone/>
+            </a:pPr>
+            <a:r>
+              <a:rPr lang="en-US" sz="2000" b="1" dirty="0">
+                <a:solidFill>
+                  <a:srgbClr val="F2F0EA"/>
+                </a:solidFill>
+                <a:latin typeface="Georgia" pitchFamily="34" charset="0"/>
+                <a:ea typeface="Georgia" pitchFamily="34" charset="-122"/>
+                <a:cs typeface="Georgia" pitchFamily="34" charset="-120"/>
+              </a:rPr>
+              <a:t>No fim</a:t>
+            </a:r>
+            <a:pPr indent="0" marL="0">
+              <a:lnSpc>
+                <a:spcPct val="120000"/>
+              </a:lnSpc>
+              <a:buNone/>
+            </a:pPr>
+            <a:r>
+              <a:rPr lang="en-US" sz="2000" dirty="0">
+                <a:solidFill>
+                  <a:srgbClr val="F2F0EA"/>
+                </a:solidFill>
+                <a:latin typeface="Georgia" pitchFamily="34" charset="0"/>
+                <a:ea typeface="Georgia" pitchFamily="34" charset="-122"/>
+                <a:cs typeface="Georgia" pitchFamily="34" charset="-120"/>
+              </a:rPr>
+              <a:t>: paragoge (acrescenta-se um som) e apócope (cai um som). </a:t>
+            </a:r>
+            <a:pPr indent="0" marL="0">
+              <a:lnSpc>
+                <a:spcPct val="120000"/>
+              </a:lnSpc>
+              <a:buNone/>
+            </a:pPr>
+            <a:r>
+              <a:rPr lang="en-US" sz="2000" b="1" dirty="0">
+                <a:solidFill>
+                  <a:srgbClr val="F2F0EA"/>
+                </a:solidFill>
+                <a:latin typeface="Georgia" pitchFamily="34" charset="0"/>
+                <a:ea typeface="Georgia" pitchFamily="34" charset="-122"/>
+                <a:cs typeface="Georgia" pitchFamily="34" charset="-120"/>
+              </a:rPr>
+              <a:t>Outras mudanças</a:t>
+            </a:r>
+            <a:pPr indent="0" marL="0">
+              <a:lnSpc>
+                <a:spcPct val="120000"/>
+              </a:lnSpc>
+              <a:buNone/>
+            </a:pPr>
+            <a:r>
+              <a:rPr lang="en-US" sz="2000" dirty="0">
+                <a:solidFill>
+                  <a:srgbClr val="F2F0EA"/>
+                </a:solidFill>
+                <a:latin typeface="Georgia" pitchFamily="34" charset="0"/>
+                <a:ea typeface="Georgia" pitchFamily="34" charset="-122"/>
+                <a:cs typeface="Georgia" pitchFamily="34" charset="-120"/>
+              </a:rPr>
+              <a:t>: metátese (sons trocam de lugar), sonorização (um som consonântico surdo passa a sonoro: p&gt;b, t&gt;d, c&gt;g), palatalização (um som passa a palatal, por exemplo ch, lh, nh) e assimilação (um som fica igual ou parecido com o vizinho).</a:t>
             </a:r>
             <a:endParaRPr lang="en-US" sz="2000" dirty="0"/>
           </a:p>
@@ -5050,7 +5193,75 @@
                 <a:ea typeface="Arial" pitchFamily="34" charset="-122"/>
                 <a:cs typeface="Arial" pitchFamily="34" charset="-120"/>
               </a:rPr>
-              <a:t>No fim, o cartão extra: «Luna, lua»</a:t>
+              <a:t>No fim, o cartão extra: «</a:t>
+            </a:r>
+            <a:pPr indent="0" marL="0">
+              <a:lnSpc>
+                <a:spcPct val="105000"/>
+              </a:lnSpc>
+              <a:buNone/>
+            </a:pPr>
+            <a:r>
+              <a:rPr lang="en-US" sz="2200" i="1" dirty="0">
+                <a:solidFill>
+                  <a:srgbClr val="F2F0EA"/>
+                </a:solidFill>
+                <a:latin typeface="Arial" pitchFamily="34" charset="0"/>
+                <a:ea typeface="Arial" pitchFamily="34" charset="-122"/>
+                <a:cs typeface="Arial" pitchFamily="34" charset="-120"/>
+              </a:rPr>
+              <a:t>Luna</a:t>
+            </a:r>
+            <a:pPr indent="0" marL="0">
+              <a:lnSpc>
+                <a:spcPct val="105000"/>
+              </a:lnSpc>
+              <a:buNone/>
+            </a:pPr>
+            <a:r>
+              <a:rPr lang="en-US" sz="2200" dirty="0">
+                <a:solidFill>
+                  <a:srgbClr val="F2F0EA"/>
+                </a:solidFill>
+                <a:latin typeface="Arial" pitchFamily="34" charset="0"/>
+                <a:ea typeface="Arial" pitchFamily="34" charset="-122"/>
+                <a:cs typeface="Arial" pitchFamily="34" charset="-120"/>
+              </a:rPr>
+              <a:t>, </a:t>
+            </a:r>
+            <a:pPr indent="0" marL="0">
+              <a:lnSpc>
+                <a:spcPct val="105000"/>
+              </a:lnSpc>
+              <a:buNone/>
+            </a:pPr>
+            <a:r>
+              <a:rPr lang="en-US" sz="2200" i="1" dirty="0">
+                <a:solidFill>
+                  <a:srgbClr val="F2F0EA"/>
+                </a:solidFill>
+                <a:latin typeface="Arial" pitchFamily="34" charset="0"/>
+                <a:ea typeface="Arial" pitchFamily="34" charset="-122"/>
+                <a:cs typeface="Arial" pitchFamily="34" charset="-120"/>
+              </a:rPr>
+              <a:t>lua</a:t>
+            </a:r>
+            <a:pPr indent="0" marL="0">
+              <a:lnSpc>
+                <a:spcPct val="105000"/>
+              </a:lnSpc>
+              <a:buNone/>
+            </a:pPr>
+            <a:r>
+              <a:rPr lang="en-US" sz="2200" dirty="0">
+                <a:solidFill>
+                  <a:srgbClr val="F2F0EA"/>
+                </a:solidFill>
+                <a:latin typeface="Arial" pitchFamily="34" charset="0"/>
+                <a:ea typeface="Arial" pitchFamily="34" charset="-122"/>
+                <a:cs typeface="Arial" pitchFamily="34" charset="-120"/>
+              </a:rPr>
+              <a:t>»</a:t>
             </a:r>
             <a:endParaRPr lang="en-US" sz="2200" dirty="0"/>
           </a:p>
@@ -6796,7 +7007,211 @@
                 <a:ea typeface="Arial" pitchFamily="34" charset="-122"/>
                 <a:cs typeface="Arial" pitchFamily="34" charset="-120"/>
               </a:rPr>
-              <a:t>O quadro mostra o mesmo processo a repetir-se, c &gt; g em acume &gt; gume e em amicum &gt; amigo: é regra, não acidente.</a:t>
+              <a:t>O quadro mostra o mesmo processo a repetir-se, </a:t>
+            </a:r>
+            <a:pPr indent="0" marL="0">
+              <a:lnSpc>
+                <a:spcPct val="105000"/>
+              </a:lnSpc>
+              <a:buNone/>
+            </a:pPr>
+            <a:r>
+              <a:rPr lang="en-US" sz="2200" i="1" dirty="0">
+                <a:solidFill>
+                  <a:srgbClr val="F2F0EA"/>
+                </a:solidFill>
+                <a:latin typeface="Arial" pitchFamily="34" charset="0"/>
+                <a:ea typeface="Arial" pitchFamily="34" charset="-122"/>
+                <a:cs typeface="Arial" pitchFamily="34" charset="-120"/>
+              </a:rPr>
+              <a:t>c</a:t>
+            </a:r>
+            <a:pPr indent="0" marL="0">
+              <a:lnSpc>
+                <a:spcPct val="105000"/>
+              </a:lnSpc>
+              <a:buNone/>
+            </a:pPr>
+            <a:r>
+              <a:rPr lang="en-US" sz="2200" dirty="0">
+                <a:solidFill>
+                  <a:srgbClr val="F2F0EA"/>
+                </a:solidFill>
+                <a:latin typeface="Arial" pitchFamily="34" charset="0"/>
+                <a:ea typeface="Arial" pitchFamily="34" charset="-122"/>
+                <a:cs typeface="Arial" pitchFamily="34" charset="-120"/>
+              </a:rPr>
+              <a:t> &gt; </a:t>
+            </a:r>
+            <a:pPr indent="0" marL="0">
+              <a:lnSpc>
+                <a:spcPct val="105000"/>
+              </a:lnSpc>
+              <a:buNone/>
+            </a:pPr>
+            <a:r>
+              <a:rPr lang="en-US" sz="2200" i="1" dirty="0">
+                <a:solidFill>
+                  <a:srgbClr val="F2F0EA"/>
+                </a:solidFill>
+                <a:latin typeface="Arial" pitchFamily="34" charset="0"/>
+                <a:ea typeface="Arial" pitchFamily="34" charset="-122"/>
+                <a:cs typeface="Arial" pitchFamily="34" charset="-120"/>
+              </a:rPr>
+              <a:t>g</a:t>
+            </a:r>
+            <a:pPr indent="0" marL="0">
+              <a:lnSpc>
+                <a:spcPct val="105000"/>
+              </a:lnSpc>
+              <a:buNone/>
+            </a:pPr>
+            <a:r>
+              <a:rPr lang="en-US" sz="2200" dirty="0">
+                <a:solidFill>
+                  <a:srgbClr val="F2F0EA"/>
+                </a:solidFill>
+                <a:latin typeface="Arial" pitchFamily="34" charset="0"/>
+                <a:ea typeface="Arial" pitchFamily="34" charset="-122"/>
+                <a:cs typeface="Arial" pitchFamily="34" charset="-120"/>
+              </a:rPr>
+              <a:t> em </a:t>
+            </a:r>
+            <a:pPr indent="0" marL="0">
+              <a:lnSpc>
+                <a:spcPct val="105000"/>
+              </a:lnSpc>
+              <a:buNone/>
+            </a:pPr>
+            <a:r>
+              <a:rPr lang="en-US" sz="2200" i="1" dirty="0">
+                <a:solidFill>
+                  <a:srgbClr val="F2F0EA"/>
+                </a:solidFill>
+                <a:latin typeface="Arial" pitchFamily="34" charset="0"/>
+                <a:ea typeface="Arial" pitchFamily="34" charset="-122"/>
+                <a:cs typeface="Arial" pitchFamily="34" charset="-120"/>
+              </a:rPr>
+              <a:t>acume</a:t>
+            </a:r>
+            <a:pPr indent="0" marL="0">
+              <a:lnSpc>
+                <a:spcPct val="105000"/>
+              </a:lnSpc>
+              <a:buNone/>
+            </a:pPr>
+            <a:r>
+              <a:rPr lang="en-US" sz="2200" dirty="0">
+                <a:solidFill>
+                  <a:srgbClr val="F2F0EA"/>
+                </a:solidFill>
+                <a:latin typeface="Arial" pitchFamily="34" charset="0"/>
+                <a:ea typeface="Arial" pitchFamily="34" charset="-122"/>
+                <a:cs typeface="Arial" pitchFamily="34" charset="-120"/>
+              </a:rPr>
+              <a:t> &gt; </a:t>
+            </a:r>
+            <a:pPr indent="0" marL="0">
+              <a:lnSpc>
+                <a:spcPct val="105000"/>
+              </a:lnSpc>
+              <a:buNone/>
+            </a:pPr>
+            <a:r>
+              <a:rPr lang="en-US" sz="2200" i="1" dirty="0">
+                <a:solidFill>
+                  <a:srgbClr val="F2F0EA"/>
+                </a:solidFill>
+                <a:latin typeface="Arial" pitchFamily="34" charset="0"/>
+                <a:ea typeface="Arial" pitchFamily="34" charset="-122"/>
+                <a:cs typeface="Arial" pitchFamily="34" charset="-120"/>
+              </a:rPr>
+              <a:t>gume</a:t>
+            </a:r>
+            <a:pPr indent="0" marL="0">
+              <a:lnSpc>
+                <a:spcPct val="105000"/>
+              </a:lnSpc>
+              <a:buNone/>
+            </a:pPr>
+            <a:r>
+              <a:rPr lang="en-US" sz="2200" dirty="0">
+                <a:solidFill>
+                  <a:srgbClr val="F2F0EA"/>
+                </a:solidFill>
+                <a:latin typeface="Arial" pitchFamily="34" charset="0"/>
+                <a:ea typeface="Arial" pitchFamily="34" charset="-122"/>
+                <a:cs typeface="Arial" pitchFamily="34" charset="-120"/>
+              </a:rPr>
+              <a:t> e em </a:t>
+            </a:r>
+            <a:pPr indent="0" marL="0">
+              <a:lnSpc>
+                <a:spcPct val="105000"/>
+              </a:lnSpc>
+              <a:buNone/>
+            </a:pPr>
+            <a:r>
+              <a:rPr lang="en-US" sz="2200" i="1" dirty="0">
+                <a:solidFill>
+                  <a:srgbClr val="F2F0EA"/>
+                </a:solidFill>
+                <a:latin typeface="Arial" pitchFamily="34" charset="0"/>
+                <a:ea typeface="Arial" pitchFamily="34" charset="-122"/>
+                <a:cs typeface="Arial" pitchFamily="34" charset="-120"/>
+              </a:rPr>
+              <a:t>amicum</a:t>
+            </a:r>
+            <a:pPr indent="0" marL="0">
+              <a:lnSpc>
+                <a:spcPct val="105000"/>
+              </a:lnSpc>
+              <a:buNone/>
+            </a:pPr>
+            <a:r>
+              <a:rPr lang="en-US" sz="2200" dirty="0">
+                <a:solidFill>
+                  <a:srgbClr val="F2F0EA"/>
+                </a:solidFill>
+                <a:latin typeface="Arial" pitchFamily="34" charset="0"/>
+                <a:ea typeface="Arial" pitchFamily="34" charset="-122"/>
+                <a:cs typeface="Arial" pitchFamily="34" charset="-120"/>
+              </a:rPr>
+              <a:t> &gt; </a:t>
+            </a:r>
+            <a:pPr indent="0" marL="0">
+              <a:lnSpc>
+                <a:spcPct val="105000"/>
+              </a:lnSpc>
+              <a:buNone/>
+            </a:pPr>
+            <a:r>
+              <a:rPr lang="en-US" sz="2200" i="1" dirty="0">
+                <a:solidFill>
+                  <a:srgbClr val="F2F0EA"/>
+                </a:solidFill>
+                <a:latin typeface="Arial" pitchFamily="34" charset="0"/>
+                <a:ea typeface="Arial" pitchFamily="34" charset="-122"/>
+                <a:cs typeface="Arial" pitchFamily="34" charset="-120"/>
+              </a:rPr>
+              <a:t>amigo</a:t>
+            </a:r>
+            <a:pPr indent="0" marL="0">
+              <a:lnSpc>
+                <a:spcPct val="105000"/>
+              </a:lnSpc>
+              <a:buNone/>
+            </a:pPr>
+            <a:r>
+              <a:rPr lang="en-US" sz="2200" dirty="0">
+                <a:solidFill>
+                  <a:srgbClr val="F2F0EA"/>
+                </a:solidFill>
+                <a:latin typeface="Arial" pitchFamily="34" charset="0"/>
+                <a:ea typeface="Arial" pitchFamily="34" charset="-122"/>
+                <a:cs typeface="Arial" pitchFamily="34" charset="-120"/>
+              </a:rPr>
+              <a:t>: é regra, não acidente.</a:t>
             </a:r>
             <a:endParaRPr lang="en-US" sz="2200" dirty="0"/>
           </a:p>
@@ -6904,7 +7319,245 @@
                 <a:ea typeface="Arial" pitchFamily="34" charset="-122"/>
                 <a:cs typeface="Arial" pitchFamily="34" charset="-120"/>
               </a:rPr>
-              <a:t>Uma palavra pode somar processos: em plenum &gt; chẽo &gt; cheio, cai o n e o til marca a nasalidade (síncope), pl passa a ch (palatalização) e, perdida a nasalidade, junta-se um i (epêntese).</a:t>
+              <a:t>Uma palavra pode somar processos: em </a:t>
+            </a:r>
+            <a:pPr indent="0" marL="0">
+              <a:lnSpc>
+                <a:spcPct val="105000"/>
+              </a:lnSpc>
+              <a:buNone/>
+            </a:pPr>
+            <a:r>
+              <a:rPr lang="en-US" sz="2200" i="1" dirty="0">
+                <a:solidFill>
+                  <a:srgbClr val="F2F0EA"/>
+                </a:solidFill>
+                <a:latin typeface="Arial" pitchFamily="34" charset="0"/>
+                <a:ea typeface="Arial" pitchFamily="34" charset="-122"/>
+                <a:cs typeface="Arial" pitchFamily="34" charset="-120"/>
+              </a:rPr>
+              <a:t>plenum</a:t>
+            </a:r>
+            <a:pPr indent="0" marL="0">
+              <a:lnSpc>
+                <a:spcPct val="105000"/>
+              </a:lnSpc>
+              <a:buNone/>
+            </a:pPr>
+            <a:r>
+              <a:rPr lang="en-US" sz="2200" dirty="0">
+                <a:solidFill>
+                  <a:srgbClr val="F2F0EA"/>
+                </a:solidFill>
+                <a:latin typeface="Arial" pitchFamily="34" charset="0"/>
+                <a:ea typeface="Arial" pitchFamily="34" charset="-122"/>
+                <a:cs typeface="Arial" pitchFamily="34" charset="-120"/>
+              </a:rPr>
+              <a:t> &gt; </a:t>
+            </a:r>
+            <a:pPr indent="0" marL="0">
+              <a:lnSpc>
+                <a:spcPct val="105000"/>
+              </a:lnSpc>
+              <a:buNone/>
+            </a:pPr>
+            <a:r>
+              <a:rPr lang="en-US" sz="2200" i="1" dirty="0">
+                <a:solidFill>
+                  <a:srgbClr val="F2F0EA"/>
+                </a:solidFill>
+                <a:latin typeface="Arial" pitchFamily="34" charset="0"/>
+                <a:ea typeface="Arial" pitchFamily="34" charset="-122"/>
+                <a:cs typeface="Arial" pitchFamily="34" charset="-120"/>
+              </a:rPr>
+              <a:t>chẽo</a:t>
+            </a:r>
+            <a:pPr indent="0" marL="0">
+              <a:lnSpc>
+                <a:spcPct val="105000"/>
+              </a:lnSpc>
+              <a:buNone/>
+            </a:pPr>
+            <a:r>
+              <a:rPr lang="en-US" sz="2200" dirty="0">
+                <a:solidFill>
+                  <a:srgbClr val="F2F0EA"/>
+                </a:solidFill>
+                <a:latin typeface="Arial" pitchFamily="34" charset="0"/>
+                <a:ea typeface="Arial" pitchFamily="34" charset="-122"/>
+                <a:cs typeface="Arial" pitchFamily="34" charset="-120"/>
+              </a:rPr>
+              <a:t> &gt; </a:t>
+            </a:r>
+            <a:pPr indent="0" marL="0">
+              <a:lnSpc>
+                <a:spcPct val="105000"/>
+              </a:lnSpc>
+              <a:buNone/>
+            </a:pPr>
+            <a:r>
+              <a:rPr lang="en-US" sz="2200" i="1" dirty="0">
+                <a:solidFill>
+                  <a:srgbClr val="F2F0EA"/>
+                </a:solidFill>
+                <a:latin typeface="Arial" pitchFamily="34" charset="0"/>
+                <a:ea typeface="Arial" pitchFamily="34" charset="-122"/>
+                <a:cs typeface="Arial" pitchFamily="34" charset="-120"/>
+              </a:rPr>
+              <a:t>cheio</a:t>
+            </a:r>
+            <a:pPr indent="0" marL="0">
+              <a:lnSpc>
+                <a:spcPct val="105000"/>
+              </a:lnSpc>
+              <a:buNone/>
+            </a:pPr>
+            <a:r>
+              <a:rPr lang="en-US" sz="2200" dirty="0">
+                <a:solidFill>
+                  <a:srgbClr val="F2F0EA"/>
+                </a:solidFill>
+                <a:latin typeface="Arial" pitchFamily="34" charset="0"/>
+                <a:ea typeface="Arial" pitchFamily="34" charset="-122"/>
+                <a:cs typeface="Arial" pitchFamily="34" charset="-120"/>
+              </a:rPr>
+              <a:t>, cai o </a:t>
+            </a:r>
+            <a:pPr indent="0" marL="0">
+              <a:lnSpc>
+                <a:spcPct val="105000"/>
+              </a:lnSpc>
+              <a:buNone/>
+            </a:pPr>
+            <a:r>
+              <a:rPr lang="en-US" sz="2200" i="1" dirty="0">
+                <a:solidFill>
+                  <a:srgbClr val="F2F0EA"/>
+                </a:solidFill>
+                <a:latin typeface="Arial" pitchFamily="34" charset="0"/>
+                <a:ea typeface="Arial" pitchFamily="34" charset="-122"/>
+                <a:cs typeface="Arial" pitchFamily="34" charset="-120"/>
+              </a:rPr>
+              <a:t>n</a:t>
+            </a:r>
+            <a:pPr indent="0" marL="0">
+              <a:lnSpc>
+                <a:spcPct val="105000"/>
+              </a:lnSpc>
+              <a:buNone/>
+            </a:pPr>
+            <a:r>
+              <a:rPr lang="en-US" sz="2200" dirty="0">
+                <a:solidFill>
+                  <a:srgbClr val="F2F0EA"/>
+                </a:solidFill>
+                <a:latin typeface="Arial" pitchFamily="34" charset="0"/>
+                <a:ea typeface="Arial" pitchFamily="34" charset="-122"/>
+                <a:cs typeface="Arial" pitchFamily="34" charset="-120"/>
+              </a:rPr>
+              <a:t> e o til marca a nasalidade (síncope), </a:t>
+            </a:r>
+            <a:pPr indent="0" marL="0">
+              <a:lnSpc>
+                <a:spcPct val="105000"/>
+              </a:lnSpc>
+              <a:buNone/>
+            </a:pPr>
+            <a:r>
+              <a:rPr lang="en-US" sz="2200" i="1" dirty="0">
+                <a:solidFill>
+                  <a:srgbClr val="F2F0EA"/>
+                </a:solidFill>
+                <a:latin typeface="Arial" pitchFamily="34" charset="0"/>
+                <a:ea typeface="Arial" pitchFamily="34" charset="-122"/>
+                <a:cs typeface="Arial" pitchFamily="34" charset="-120"/>
+              </a:rPr>
+              <a:t>pl</a:t>
+            </a:r>
+            <a:pPr indent="0" marL="0">
+              <a:lnSpc>
+                <a:spcPct val="105000"/>
+              </a:lnSpc>
+              <a:buNone/>
+            </a:pPr>
+            <a:r>
+              <a:rPr lang="en-US" sz="2200" dirty="0">
+                <a:solidFill>
+                  <a:srgbClr val="F2F0EA"/>
+                </a:solidFill>
+                <a:latin typeface="Arial" pitchFamily="34" charset="0"/>
+                <a:ea typeface="Arial" pitchFamily="34" charset="-122"/>
+                <a:cs typeface="Arial" pitchFamily="34" charset="-120"/>
+              </a:rPr>
+              <a:t> passa a </a:t>
+            </a:r>
+            <a:pPr indent="0" marL="0">
+              <a:lnSpc>
+                <a:spcPct val="105000"/>
+              </a:lnSpc>
+              <a:buNone/>
+            </a:pPr>
+            <a:r>
+              <a:rPr lang="en-US" sz="2200" i="1" dirty="0">
+                <a:solidFill>
+                  <a:srgbClr val="F2F0EA"/>
+                </a:solidFill>
+                <a:latin typeface="Arial" pitchFamily="34" charset="0"/>
+                <a:ea typeface="Arial" pitchFamily="34" charset="-122"/>
+                <a:cs typeface="Arial" pitchFamily="34" charset="-120"/>
+              </a:rPr>
+              <a:t>ch</a:t>
+            </a:r>
+            <a:pPr indent="0" marL="0">
+              <a:lnSpc>
+                <a:spcPct val="105000"/>
+              </a:lnSpc>
+              <a:buNone/>
+            </a:pPr>
+            <a:r>
+              <a:rPr lang="en-US" sz="2200" dirty="0">
+                <a:solidFill>
+                  <a:srgbClr val="F2F0EA"/>
+                </a:solidFill>
+                <a:latin typeface="Arial" pitchFamily="34" charset="0"/>
+                <a:ea typeface="Arial" pitchFamily="34" charset="-122"/>
+                <a:cs typeface="Arial" pitchFamily="34" charset="-120"/>
+              </a:rPr>
+              <a:t> (palatalização) e, perdida a nasalidade, junta-se um </a:t>
+            </a:r>
+            <a:pPr indent="0" marL="0">
+              <a:lnSpc>
+                <a:spcPct val="105000"/>
+              </a:lnSpc>
+              <a:buNone/>
+            </a:pPr>
+            <a:r>
+              <a:rPr lang="en-US" sz="2200" i="1" dirty="0">
+                <a:solidFill>
+                  <a:srgbClr val="F2F0EA"/>
+                </a:solidFill>
+                <a:latin typeface="Arial" pitchFamily="34" charset="0"/>
+                <a:ea typeface="Arial" pitchFamily="34" charset="-122"/>
+                <a:cs typeface="Arial" pitchFamily="34" charset="-120"/>
+              </a:rPr>
+              <a:t>i</a:t>
+            </a:r>
+            <a:pPr indent="0" marL="0">
+              <a:lnSpc>
+                <a:spcPct val="105000"/>
+              </a:lnSpc>
+              <a:buNone/>
+            </a:pPr>
+            <a:r>
+              <a:rPr lang="en-US" sz="2200" dirty="0">
+                <a:solidFill>
+                  <a:srgbClr val="F2F0EA"/>
+                </a:solidFill>
+                <a:latin typeface="Arial" pitchFamily="34" charset="0"/>
+                <a:ea typeface="Arial" pitchFamily="34" charset="-122"/>
+                <a:cs typeface="Arial" pitchFamily="34" charset="-120"/>
+              </a:rPr>
+              <a:t> (epêntese).</a:t>
             </a:r>
             <a:endParaRPr lang="en-US" sz="2200" dirty="0"/>
           </a:p>
